--- a/docs/pptx/Ch2_P2_Memory_Stack_Function_Calls.pptx
+++ b/docs/pptx/Ch2_P2_Memory_Stack_Function_Calls.pptx
@@ -518,10 +518,19 @@
           <a:lstStyle/>
           <a:p>
             <a:r>
-              <a:rPr lang="en-US" dirty="0"/>
-              <a:t/>
-            </a:r>
-            <a:endParaRPr lang="en-US" dirty="0"/>
+              <a:t>TITRE : Memory Stack &amp; Function Calls</a:t>
+            </a:r>
+          </a:p>
+          <a:p>
+            <a:r>
+              <a:t>Durée : 1h30</a:t>
+            </a:r>
+          </a:p>
+          <a:p/>
+          <a:p>
+            <a:r>
+              <a:t>Matériel : site → Monde 1 → Ch2 (simulateur call stack)</a:t>
+            </a:r>
           </a:p>
         </p:txBody>
       </p:sp>
@@ -1398,10 +1407,25 @@
           <a:lstStyle/>
           <a:p>
             <a:r>
-              <a:rPr lang="en-US" dirty="0"/>
-              <a:t/>
-            </a:r>
-            <a:endParaRPr lang="en-US" dirty="0"/>
+              <a:t>PROF: Dessiner au tableau la séparation Stack/Heap.</a:t>
+            </a:r>
+          </a:p>
+          <a:p/>
+          <a:p>
+            <a:r>
+              <a:t>Stack = rapide, automatique, LIFO</a:t>
+            </a:r>
+          </a:p>
+          <a:p>
+            <a:r>
+              <a:t>Heap = dynamique, géré par le GC</a:t>
+            </a:r>
+          </a:p>
+          <a:p/>
+          <a:p>
+            <a:r>
+              <a:t>Question : 'Quand vous faites new ArrayList(), où est stocké l'objet ?' → Heap</a:t>
+            </a:r>
           </a:p>
         </p:txBody>
       </p:sp>
@@ -1486,10 +1510,25 @@
           <a:lstStyle/>
           <a:p>
             <a:r>
-              <a:rPr lang="en-US" dirty="0"/>
-              <a:t/>
-            </a:r>
-            <a:endParaRPr lang="en-US" dirty="0"/>
+              <a:t>PROF: Expliquer que la JVM utilise un STACK pour gérer les appels de fonctions.</a:t>
+            </a:r>
+          </a:p>
+          <a:p/>
+          <a:p>
+            <a:r>
+              <a:t>Chaque appel = un 'stack frame' empilé.</a:t>
+            </a:r>
+          </a:p>
+          <a:p>
+            <a:r>
+              <a:t>Quand la fonction retourne = frame dépilé.</a:t>
+            </a:r>
+          </a:p>
+          <a:p/>
+          <a:p>
+            <a:r>
+              <a:t>Analogie : pile de dossiers sur un bureau. Le dernier posé est le premier traité.</a:t>
+            </a:r>
           </a:p>
         </p:txBody>
       </p:sp>
@@ -1574,10 +1613,34 @@
           <a:lstStyle/>
           <a:p>
             <a:r>
-              <a:rPr lang="en-US" dirty="0"/>
-              <a:t/>
-            </a:r>
-            <a:endParaRPr lang="en-US" dirty="0"/>
+              <a:t>PROF: Le stack frame contient :</a:t>
+            </a:r>
+          </a:p>
+          <a:p>
+            <a:r>
+              <a:t>1. Variables locales</a:t>
+            </a:r>
+          </a:p>
+          <a:p>
+            <a:r>
+              <a:t>2. Paramètres</a:t>
+            </a:r>
+          </a:p>
+          <a:p>
+            <a:r>
+              <a:t>3. Adresse de retour</a:t>
+            </a:r>
+          </a:p>
+          <a:p>
+            <a:r>
+              <a:t>4. Valeur de retour</a:t>
+            </a:r>
+          </a:p>
+          <a:p/>
+          <a:p>
+            <a:r>
+              <a:t>Dessiner un exemple au tableau avec main() qui appelle calculer(5, 3).</a:t>
+            </a:r>
           </a:p>
         </p:txBody>
       </p:sp>
@@ -1662,10 +1725,35 @@
           <a:lstStyle/>
           <a:p>
             <a:r>
-              <a:rPr lang="en-US" dirty="0"/>
-              <a:t/>
-            </a:r>
-            <a:endParaRPr lang="en-US" dirty="0"/>
+              <a:t>PROF: Exercice en live : tracer le call stack étape par étape.</a:t>
+            </a:r>
+          </a:p>
+          <a:p/>
+          <a:p>
+            <a:r>
+              <a:t>1. main() empilé</a:t>
+            </a:r>
+          </a:p>
+          <a:p>
+            <a:r>
+              <a:t>2. calculer(5,3) empilé au-dessus</a:t>
+            </a:r>
+          </a:p>
+          <a:p>
+            <a:r>
+              <a:t>3. calculer retourne → dépilé</a:t>
+            </a:r>
+          </a:p>
+          <a:p>
+            <a:r>
+              <a:t>4. main continue avec le résultat</a:t>
+            </a:r>
+          </a:p>
+          <a:p/>
+          <a:p>
+            <a:r>
+              <a:t>Utiliser le simulateur sur le site pour montrer visuellement.</a:t>
+            </a:r>
           </a:p>
         </p:txBody>
       </p:sp>
